--- a/content/decks/media-studies/media-studies-s1-lesson-14-consolidation-and-the-coverage-matrix.pptx
+++ b/content/decks/media-studies/media-studies-s1-lesson-14-consolidation-and-the-coverage-matrix.pptx
@@ -1039,7 +1039,7 @@
           <a:p>
             <a:r>
               <a:rPr lang="en-US" dirty="0"/>
-              <a:t>The moon atlas as the emblem of complete coverage: the empty cell is the point of the exercise.</a:t>
+              <a:t>The moon atlas sets the standard for coverage. The empty cell is the point of the exercise, so find it without flinching.</a:t>
             </a:r>
             <a:endParaRPr lang="en-US" dirty="0"/>
           </a:p>
@@ -3898,7 +3898,7 @@
       </p:grpSpPr>
       <p:pic>
         <p:nvPicPr>
-          <p:cNvPr id="2" name="Image 0" descr="/private/tmp/claude-501/-Users-dogan-Documents-Vaults-Courses/a3a5132d-721f-4cd4-8ddd-e62e2b37b51b/scratchpad/img/crops/loewy-moon_a637.jpg">    </p:cNvPr>
+          <p:cNvPr id="2" name="Image 0" descr="/Users/dogan/Documents/Vaults/Courses/wiki/classes/media-studies/decks/_build/img/crops/loewy-moon_a637.jpg">    </p:cNvPr>
           <p:cNvPicPr>
             <a:picLocks noChangeAspect="1"/>
           </p:cNvPicPr>
@@ -4121,7 +4121,7 @@
                 <a:ea typeface="Georgia" pitchFamily="34" charset="-122"/>
                 <a:cs typeface="Georgia" pitchFamily="34" charset="-120"/>
               </a:rPr>
-              <a:t>Two astronomers spent years photographing the entire moon, plate by plate, so that no region went unexamined. That is the standard of coverage for this week: not a favourite topic revisited, but every cell of the matrix looked at honestly, including the empty ones.</a:t>
+              <a:t>Two astronomers spent years photographing the entire moon, plate by plate, so that no region went unexamined. That is the standard this week. Every cell of the matrix gets looked at honestly, including the empty ones. Revisiting the topic you already like proves nothing.</a:t>
             </a:r>
             <a:endParaRPr lang="en-US" sz="1800" dirty="0"/>
           </a:p>
@@ -5349,19 +5349,22 @@
         <p:spPr>
           <a:xfrm>
             <a:off x="822960" y="5029200"/>
-            <a:ext cx="10543032" cy="365760"/>
-          </a:xfrm>
-          <a:prstGeom prst="rect">
-            <a:avLst/>
-          </a:prstGeom>
-          <a:noFill/>
-          <a:ln/>
-        </p:spPr>
-        <p:txBody>
-          <a:bodyPr wrap="square" lIns="0" tIns="0" rIns="0" bIns="0" rtlCol="0" anchor="ctr"/>
+            <a:ext cx="10543032" cy="640080"/>
+          </a:xfrm>
+          <a:prstGeom prst="rect">
+            <a:avLst/>
+          </a:prstGeom>
+          <a:noFill/>
+          <a:ln/>
+        </p:spPr>
+        <p:txBody>
+          <a:bodyPr wrap="square" lIns="0" tIns="0" rIns="0" bIns="0" rtlCol="0" anchor="t"/>
           <a:lstStyle/>
           <a:p>
             <a:pPr indent="0" marL="0">
+              <a:lnSpc>
+                <a:spcPts val="1600"/>
+              </a:lnSpc>
               <a:buNone/>
             </a:pPr>
             <a:r>
@@ -5373,7 +5376,7 @@
                 <a:ea typeface="Arial" pitchFamily="34" charset="-122"/>
                 <a:cs typeface="Arial" pitchFamily="34" charset="-120"/>
               </a:rPr>
-              <a:t>Evidence in the document, thin, or empty. The room should see a cell scored empty without ceremony.</a:t>
+              <a:t>Run as consolidation Jeopardy: teams claim a cell by producing the evidence, the room verifies: evidenced, thin, or empty. An honest empty scores too; the game rewards the audit, not the bluff.</a:t>
             </a:r>
             <a:endParaRPr lang="en-US" sz="1200" dirty="0"/>
           </a:p>
